--- a/docs/洲遊幣Lite_後台操作手冊.pptx
+++ b/docs/洲遊幣Lite_後台操作手冊.pptx
@@ -3506,7 +3506,7 @@
                 <a:ea typeface="Consolas" pitchFamily="34" charset="-122"/>
                 <a:cs typeface="Consolas" pitchFamily="34" charset="-120"/>
               </a:rPr>
-              <a:t>ADMIN_USERS=tony:密碼A,alisha:密碼B,katniss:密碼C</a:t>
+              <a:t>ADMIN_USERS=tony:密碼A,kh-mktg:密碼B,tpe-mktg:密碼C</a:t>
             </a:r>
             <a:endParaRPr lang="en-US" sz="1300" dirty="0"/>
           </a:p>
